--- a/materials/Day2.pptx
+++ b/materials/Day2.pptx
@@ -8,7 +8,7 @@
     <p:notesMasterId r:id="rId24"/>
   </p:notesMasterIdLst>
   <p:sldIdLst>
-    <p:sldId id="622" r:id="rId2"/>
+    <p:sldId id="375" r:id="rId2"/>
     <p:sldId id="584" r:id="rId3"/>
     <p:sldId id="623" r:id="rId4"/>
     <p:sldId id="628" r:id="rId5"/>
@@ -291,21 +291,7 @@
             <p:ph type="sldImg"/>
           </p:nvPr>
         </p:nvSpPr>
-        <p:spPr>
-          <a:xfrm>
-            <a:off x="-228600" y="1524000"/>
-            <a:ext cx="7315200" cy="4114800"/>
-          </a:xfrm>
-          <a:prstGeom prst="rect">
-            <a:avLst/>
-          </a:prstGeom>
-          <a:noFill/>
-          <a:ln w="12700">
-            <a:solidFill>
-              <a:prstClr val="black"/>
-            </a:solidFill>
-          </a:ln>
-        </p:spPr>
+        <p:spPr/>
       </p:sp>
       <p:sp>
         <p:nvSpPr>
@@ -317,27 +303,45 @@
             <p:ph type="body" idx="1"/>
           </p:nvPr>
         </p:nvSpPr>
-        <p:spPr>
-          <a:xfrm>
-            <a:off x="685800" y="5867400"/>
-            <a:ext cx="5486400" cy="4800600"/>
-          </a:xfrm>
-          <a:prstGeom prst="rect">
-            <a:avLst/>
-          </a:prstGeom>
-        </p:spPr>
+        <p:spPr/>
         <p:txBody>
           <a:bodyPr/>
           <a:lstStyle/>
           <a:p>
-            <a:endParaRPr lang="en-US" dirty="0"/>
+            <a:r>
+              <a:rPr lang="en-US" dirty="0"/>
+              <a:t>EDITING: The course mark (top-right) and white background live in the slide master — change them once under View &gt; Slide Master. To reuse a layout, right-click a slide and Duplicate. Swap the bell-curve graphic for a topic image on other talks. Palette: teal 15686B, terracotta C2683F, ink 262320. Fonts: Bookman Old Style (headings), Calibri (body).</a:t>
+            </a:r>
+          </a:p>
+        </p:txBody>
+      </p:sp>
+      <p:sp>
+        <p:nvSpPr>
+          <p:cNvPr id="4" name="Slide Number Placeholder 3"/>
+          <p:cNvSpPr>
+            <a:spLocks noGrp="1"/>
+          </p:cNvSpPr>
+          <p:nvPr>
+            <p:ph type="sldNum" sz="quarter" idx="10"/>
+          </p:nvPr>
+        </p:nvSpPr>
+        <p:spPr/>
+        <p:txBody>
+          <a:bodyPr/>
+          <a:lstStyle/>
+          <a:p>
+            <a:fld id="{F7021451-1387-4CA6-816F-3879F97B5CBC}" type="slidenum">
+              <a:rPr lang="en-US"/>
+              <a:t>1</a:t>
+            </a:fld>
+            <a:endParaRPr lang="en-US"/>
           </a:p>
         </p:txBody>
       </p:sp>
     </p:spTree>
     <p:extLst>
       <p:ext uri="{BB962C8B-B14F-4D97-AF65-F5344CB8AC3E}">
-        <p14:creationId xmlns:p14="http://schemas.microsoft.com/office/powerpoint/2010/main" val="3163909182"/>
+        <p14:creationId xmlns:p14="http://schemas.microsoft.com/office/powerpoint/2010/main" val="1024086991"/>
       </p:ext>
     </p:extLst>
   </p:cSld>
@@ -420,6 +424,89 @@
     </p:spTree>
     <p:extLst>
       <p:ext uri="{BB962C8B-B14F-4D97-AF65-F5344CB8AC3E}">
+        <p14:creationId xmlns:p14="http://schemas.microsoft.com/office/powerpoint/2010/main" val="3163909182"/>
+      </p:ext>
+    </p:extLst>
+  </p:cSld>
+  <p:clrMapOvr>
+    <a:masterClrMapping/>
+  </p:clrMapOvr>
+</p:notes>
+</file>
+
+<file path=ppt/notesSlides/notesSlide3.xml><?xml version="1.0" encoding="utf-8"?>
+<p:notes xmlns:a="http://schemas.openxmlformats.org/drawingml/2006/main" xmlns:r="http://schemas.openxmlformats.org/officeDocument/2006/relationships" xmlns:p="http://schemas.openxmlformats.org/presentationml/2006/main">
+  <p:cSld>
+    <p:spTree>
+      <p:nvGrpSpPr>
+        <p:cNvPr id="1" name=""/>
+        <p:cNvGrpSpPr/>
+        <p:nvPr/>
+      </p:nvGrpSpPr>
+      <p:grpSpPr>
+        <a:xfrm>
+          <a:off x="0" y="0"/>
+          <a:ext cx="0" cy="0"/>
+          <a:chOff x="0" y="0"/>
+          <a:chExt cx="0" cy="0"/>
+        </a:xfrm>
+      </p:grpSpPr>
+      <p:sp>
+        <p:nvSpPr>
+          <p:cNvPr id="2" name="Slide Image Placeholder 1"/>
+          <p:cNvSpPr>
+            <a:spLocks noGrp="1" noRot="1" noChangeAspect="1"/>
+          </p:cNvSpPr>
+          <p:nvPr>
+            <p:ph type="sldImg"/>
+          </p:nvPr>
+        </p:nvSpPr>
+        <p:spPr>
+          <a:xfrm>
+            <a:off x="-228600" y="1524000"/>
+            <a:ext cx="7315200" cy="4114800"/>
+          </a:xfrm>
+          <a:prstGeom prst="rect">
+            <a:avLst/>
+          </a:prstGeom>
+          <a:noFill/>
+          <a:ln w="12700">
+            <a:solidFill>
+              <a:prstClr val="black"/>
+            </a:solidFill>
+          </a:ln>
+        </p:spPr>
+      </p:sp>
+      <p:sp>
+        <p:nvSpPr>
+          <p:cNvPr id="3" name="Notes Placeholder 2"/>
+          <p:cNvSpPr>
+            <a:spLocks noGrp="1"/>
+          </p:cNvSpPr>
+          <p:nvPr>
+            <p:ph type="body" idx="1"/>
+          </p:nvPr>
+        </p:nvSpPr>
+        <p:spPr>
+          <a:xfrm>
+            <a:off x="685800" y="5867400"/>
+            <a:ext cx="5486400" cy="4800600"/>
+          </a:xfrm>
+          <a:prstGeom prst="rect">
+            <a:avLst/>
+          </a:prstGeom>
+        </p:spPr>
+        <p:txBody>
+          <a:bodyPr/>
+          <a:lstStyle/>
+          <a:p>
+            <a:endParaRPr lang="en-US" dirty="0"/>
+          </a:p>
+        </p:txBody>
+      </p:sp>
+    </p:spTree>
+    <p:extLst>
+      <p:ext uri="{BB962C8B-B14F-4D97-AF65-F5344CB8AC3E}">
         <p14:creationId xmlns:p14="http://schemas.microsoft.com/office/powerpoint/2010/main" val="2343059386"/>
       </p:ext>
     </p:extLst>
@@ -430,7 +517,7 @@
 </p:notes>
 </file>
 
-<file path=ppt/notesSlides/notesSlide3.xml><?xml version="1.0" encoding="utf-8"?>
+<file path=ppt/notesSlides/notesSlide4.xml><?xml version="1.0" encoding="utf-8"?>
 <p:notes xmlns:a="http://schemas.openxmlformats.org/drawingml/2006/main" xmlns:r="http://schemas.openxmlformats.org/officeDocument/2006/relationships" xmlns:p="http://schemas.openxmlformats.org/presentationml/2006/main">
   <p:cSld>
     <p:spTree>
@@ -835,7 +922,7 @@
           <a:p>
             <a:fld id="{21E08557-15A8-9A43-B2AC-265A11910781}" type="datetimeFigureOut">
               <a:rPr lang="en-US" smtClean="0"/>
-              <a:t>8/19/26</a:t>
+              <a:t>8/21/26</a:t>
             </a:fld>
             <a:endParaRPr lang="en-US"/>
           </a:p>
@@ -1212,182 +1299,226 @@
       </p:grpSpPr>
       <p:sp>
         <p:nvSpPr>
-          <p:cNvPr id="2" name="DividerEyebrow">
+          <p:cNvPr id="3" name="Text 0"/>
+          <p:cNvSpPr/>
+          <p:nvPr/>
+        </p:nvSpPr>
+        <p:spPr>
+          <a:xfrm>
+            <a:off x="777240" y="1444752"/>
+            <a:ext cx="6126480" cy="1920240"/>
+          </a:xfrm>
+          <a:prstGeom prst="rect">
+            <a:avLst/>
+          </a:prstGeom>
+          <a:noFill/>
+          <a:ln/>
+        </p:spPr>
+        <p:txBody>
+          <a:bodyPr wrap="square" lIns="0" tIns="0" rIns="0" bIns="0" rtlCol="0" anchor="ctr"/>
+          <a:lstStyle/>
+          <a:p>
+            <a:pPr marL="0" indent="0" algn="l">
+              <a:buNone/>
+            </a:pPr>
+            <a:r>
+              <a:rPr lang="en-US" sz="5600" b="1" dirty="0">
+                <a:solidFill>
+                  <a:srgbClr val="262320"/>
+                </a:solidFill>
+                <a:latin typeface="Bookman Old Style" pitchFamily="34" charset="0"/>
+                <a:ea typeface="Bookman Old Style" pitchFamily="34" charset="-122"/>
+                <a:cs typeface="Bookman Old Style" pitchFamily="34" charset="-120"/>
+              </a:rPr>
+              <a:t>Healthy Skepticism</a:t>
+            </a:r>
+          </a:p>
+          <a:p>
+            <a:pPr marL="0" indent="0" algn="l">
+              <a:buNone/>
+            </a:pPr>
+            <a:r>
+              <a:rPr lang="en-US" sz="5600" b="1" dirty="0">
+                <a:solidFill>
+                  <a:srgbClr val="262320"/>
+                </a:solidFill>
+                <a:latin typeface="Bookman Old Style" pitchFamily="34" charset="0"/>
+                <a:ea typeface="Bookman Old Style" pitchFamily="34" charset="-122"/>
+                <a:cs typeface="Bookman Old Style" pitchFamily="34" charset="-120"/>
+              </a:rPr>
+              <a:t>Session 2</a:t>
+            </a:r>
+            <a:endParaRPr lang="en-US" sz="5600" dirty="0"/>
+          </a:p>
+        </p:txBody>
+      </p:sp>
+      <p:sp>
+        <p:nvSpPr>
+          <p:cNvPr id="4" name="Text 1"/>
+          <p:cNvSpPr/>
+          <p:nvPr/>
+        </p:nvSpPr>
+        <p:spPr>
+          <a:xfrm>
+            <a:off x="685800" y="3931920"/>
+            <a:ext cx="6035040" cy="1005840"/>
+          </a:xfrm>
+          <a:prstGeom prst="rect">
+            <a:avLst/>
+          </a:prstGeom>
+          <a:noFill/>
+          <a:ln/>
+        </p:spPr>
+        <p:txBody>
+          <a:bodyPr wrap="square" lIns="0" tIns="0" rIns="0" bIns="0" rtlCol="0" anchor="t"/>
+          <a:lstStyle/>
+          <a:p>
+            <a:pPr marL="0" indent="0" algn="l">
+              <a:buNone/>
+            </a:pPr>
+            <a:r>
+              <a:rPr lang="en-US" sz="2500" dirty="0">
+                <a:solidFill>
+                  <a:srgbClr val="514B44"/>
+                </a:solidFill>
+                <a:latin typeface="Calibri" pitchFamily="34" charset="0"/>
+                <a:ea typeface="Calibri" pitchFamily="34" charset="-122"/>
+                <a:cs typeface="Calibri" pitchFamily="34" charset="-120"/>
+              </a:rPr>
+              <a:t>Fault 2 </a:t>
+            </a:r>
+            <a:r>
+              <a:rPr lang="en-US" sz="2500" dirty="0" err="1">
+                <a:solidFill>
+                  <a:srgbClr val="514B44"/>
+                </a:solidFill>
+                <a:latin typeface="Calibri" pitchFamily="34" charset="0"/>
+                <a:ea typeface="Calibri" pitchFamily="34" charset="-122"/>
+                <a:cs typeface="Calibri" pitchFamily="34" charset="-120"/>
+              </a:rPr>
+              <a:t>Probility</a:t>
+            </a:r>
+            <a:r>
+              <a:rPr lang="en-US" sz="2500" dirty="0">
+                <a:solidFill>
+                  <a:srgbClr val="514B44"/>
+                </a:solidFill>
+                <a:latin typeface="Calibri" pitchFamily="34" charset="0"/>
+                <a:ea typeface="Calibri" pitchFamily="34" charset="-122"/>
+                <a:cs typeface="Calibri" pitchFamily="34" charset="-120"/>
+              </a:rPr>
+              <a:t> Reversal</a:t>
+            </a:r>
+            <a:endParaRPr lang="en-US" sz="2500" dirty="0"/>
+          </a:p>
+        </p:txBody>
+      </p:sp>
+      <p:sp>
+        <p:nvSpPr>
+          <p:cNvPr id="5" name="Text 2"/>
+          <p:cNvSpPr/>
+          <p:nvPr/>
+        </p:nvSpPr>
+        <p:spPr>
+          <a:xfrm>
+            <a:off x="685800" y="5897880"/>
+            <a:ext cx="10515600" cy="457200"/>
+          </a:xfrm>
+          <a:prstGeom prst="rect">
+            <a:avLst/>
+          </a:prstGeom>
+          <a:noFill/>
+          <a:ln/>
+        </p:spPr>
+        <p:txBody>
+          <a:bodyPr wrap="square" lIns="0" tIns="0" rIns="0" bIns="0" rtlCol="0" anchor="ctr"/>
+          <a:lstStyle/>
+          <a:p>
+            <a:pPr marL="0" indent="0" algn="l">
+              <a:buNone/>
+            </a:pPr>
+            <a:r>
+              <a:rPr lang="en-US" sz="2000" b="1" dirty="0">
+                <a:solidFill>
+                  <a:srgbClr val="262320"/>
+                </a:solidFill>
+                <a:latin typeface="Calibri" pitchFamily="34" charset="0"/>
+                <a:ea typeface="Calibri" pitchFamily="34" charset="-122"/>
+                <a:cs typeface="Calibri" pitchFamily="34" charset="-120"/>
+              </a:rPr>
+              <a:t>Murray Cantor, PhD</a:t>
+            </a:r>
+            <a:r>
+              <a:rPr lang="en-US" sz="2000" dirty="0">
+                <a:solidFill>
+                  <a:srgbClr val="8A8076"/>
+                </a:solidFill>
+                <a:latin typeface="Calibri" pitchFamily="34" charset="0"/>
+                <a:ea typeface="Calibri" pitchFamily="34" charset="-122"/>
+                <a:cs typeface="Calibri" pitchFamily="34" charset="-120"/>
+              </a:rPr>
+              <a:t> &amp; </a:t>
+            </a:r>
+            <a:r>
+              <a:rPr lang="en-US" sz="2000" b="1" dirty="0">
+                <a:solidFill>
+                  <a:srgbClr val="262320"/>
+                </a:solidFill>
+                <a:latin typeface="Calibri" pitchFamily="34" charset="0"/>
+                <a:ea typeface="Calibri" pitchFamily="34" charset="-122"/>
+                <a:cs typeface="Calibri" pitchFamily="34" charset="-120"/>
+              </a:rPr>
+              <a:t>Joel Keenan, MD</a:t>
+            </a:r>
+            <a:r>
+              <a:rPr lang="en-US" sz="2000" dirty="0">
+                <a:solidFill>
+                  <a:srgbClr val="8A8076"/>
+                </a:solidFill>
+                <a:latin typeface="Calibri" pitchFamily="34" charset="0"/>
+                <a:ea typeface="Calibri" pitchFamily="34" charset="-122"/>
+                <a:cs typeface="Calibri" pitchFamily="34" charset="-120"/>
+              </a:rPr>
+              <a:t>      [venue and date]</a:t>
+            </a:r>
+            <a:endParaRPr lang="en-US" sz="2000" dirty="0"/>
+          </a:p>
+        </p:txBody>
+      </p:sp>
+      <p:pic>
+        <p:nvPicPr>
+          <p:cNvPr id="8" name="Picture 7">
             <a:extLst>
               <a:ext uri="{FF2B5EF4-FFF2-40B4-BE49-F238E27FC236}">
-                <a16:creationId xmlns:a16="http://schemas.microsoft.com/office/drawing/2014/main" id="{43DCC678-91EF-7B44-B2D7-D2CC82E0E9AA}"/>
+                <a16:creationId xmlns:a16="http://schemas.microsoft.com/office/drawing/2014/main" id="{39FCB6C9-B600-3075-6ECF-8170100C8225}"/>
               </a:ext>
             </a:extLst>
           </p:cNvPr>
-          <p:cNvSpPr txBox="1"/>
-          <p:nvPr/>
-        </p:nvSpPr>
-        <p:spPr>
-          <a:xfrm>
-            <a:off x="1066800" y="1905000"/>
-            <a:ext cx="5080000" cy="430887"/>
-          </a:xfrm>
-          <a:prstGeom prst="rect">
-            <a:avLst/>
-          </a:prstGeom>
-          <a:noFill/>
-        </p:spPr>
-        <p:txBody>
-          <a:bodyPr vertOverflow="overflow" vert="horz" wrap="square" rtlCol="0" anchor="t" anchorCtr="0">
-            <a:spAutoFit/>
-          </a:bodyPr>
-          <a:lstStyle/>
-          <a:p>
-            <a:pPr algn="l"/>
-            <a:r>
-              <a:rPr lang="en-US" sz="2200" b="1" dirty="0">
-                <a:solidFill>
-                  <a:srgbClr val="15686B"/>
-                </a:solidFill>
-              </a:rPr>
-              <a:t>FAULT 2</a:t>
-            </a:r>
-          </a:p>
-        </p:txBody>
-      </p:sp>
-      <p:sp>
-        <p:nvSpPr>
-          <p:cNvPr id="3" name="DividerNum">
-            <a:extLst>
-              <a:ext uri="{FF2B5EF4-FFF2-40B4-BE49-F238E27FC236}">
-                <a16:creationId xmlns:a16="http://schemas.microsoft.com/office/drawing/2014/main" id="{07FB2CF1-E663-8246-8037-8D6C8382576B}"/>
-              </a:ext>
-            </a:extLst>
-          </p:cNvPr>
-          <p:cNvSpPr txBox="1"/>
-          <p:nvPr/>
-        </p:nvSpPr>
-        <p:spPr>
-          <a:xfrm>
-            <a:off x="1041400" y="2349500"/>
-            <a:ext cx="9652000" cy="1905000"/>
-          </a:xfrm>
-          <a:prstGeom prst="rect">
-            <a:avLst/>
-          </a:prstGeom>
-          <a:noFill/>
-        </p:spPr>
-        <p:txBody>
-          <a:bodyPr vertOverflow="overflow" vert="horz" wrap="square" rtlCol="0" anchor="ctr" anchorCtr="0">
-            <a:spAutoFit/>
-          </a:bodyPr>
-          <a:lstStyle/>
-          <a:p>
-            <a:pPr algn="l"/>
-            <a:r>
-              <a:rPr lang="en-US" sz="5400" b="1" dirty="0">
-                <a:solidFill>
-                  <a:srgbClr val="15686B"/>
-                </a:solidFill>
-              </a:rPr>
-              <a:t>Probability Reversal</a:t>
-            </a:r>
-          </a:p>
-        </p:txBody>
-      </p:sp>
-      <p:sp>
-        <p:nvSpPr>
-          <p:cNvPr id="4" name="DividerRule">
-            <a:extLst>
-              <a:ext uri="{FF2B5EF4-FFF2-40B4-BE49-F238E27FC236}">
-                <a16:creationId xmlns:a16="http://schemas.microsoft.com/office/drawing/2014/main" id="{9B746F38-27CC-8F48-9AB8-524EE588C1AC}"/>
-              </a:ext>
-            </a:extLst>
-          </p:cNvPr>
-          <p:cNvSpPr/>
-          <p:nvPr/>
-        </p:nvSpPr>
-        <p:spPr>
-          <a:xfrm>
-            <a:off x="1066800" y="4445000"/>
-            <a:ext cx="1143000" cy="63500"/>
-          </a:xfrm>
-          <a:prstGeom prst="rect">
-            <a:avLst/>
-          </a:prstGeom>
-          <a:solidFill>
-            <a:srgbClr val="15686B"/>
-          </a:solidFill>
-          <a:ln w="12700" cap="flat" cmpd="sng" algn="ctr">
-            <a:noFill/>
-            <a:prstDash val="solid"/>
-            <a:miter lim="800000"/>
-          </a:ln>
-        </p:spPr>
-        <p:style>
-          <a:lnRef idx="2">
-            <a:schemeClr val="accent1">
-              <a:shade val="15000"/>
-            </a:schemeClr>
-          </a:lnRef>
-          <a:fillRef idx="1">
-            <a:schemeClr val="accent1"/>
-          </a:fillRef>
-          <a:effectRef idx="0">
-            <a:schemeClr val="accent1"/>
-          </a:effectRef>
-          <a:fontRef idx="minor">
-            <a:schemeClr val="lt1"/>
-          </a:fontRef>
-        </p:style>
-        <p:txBody>
-          <a:bodyPr vertOverflow="clip" horzOverflow="clip" rtlCol="0" anchor="t"/>
-          <a:lstStyle/>
-          <a:p>
-            <a:pPr algn="l"/>
-            <a:endParaRPr lang="en-US"/>
-          </a:p>
-        </p:txBody>
-      </p:sp>
-      <p:sp>
-        <p:nvSpPr>
-          <p:cNvPr id="5" name="DividerTitle">
-            <a:extLst>
-              <a:ext uri="{FF2B5EF4-FFF2-40B4-BE49-F238E27FC236}">
-                <a16:creationId xmlns:a16="http://schemas.microsoft.com/office/drawing/2014/main" id="{423C2191-AB8A-764E-9F15-6ADA4D84F2D4}"/>
-              </a:ext>
-            </a:extLst>
-          </p:cNvPr>
-          <p:cNvSpPr txBox="1"/>
-          <p:nvPr/>
-        </p:nvSpPr>
-        <p:spPr>
-          <a:xfrm>
-            <a:off x="1016000" y="4762500"/>
-            <a:ext cx="10160000" cy="707886"/>
-          </a:xfrm>
-          <a:prstGeom prst="rect">
-            <a:avLst/>
-          </a:prstGeom>
-          <a:noFill/>
-        </p:spPr>
-        <p:txBody>
-          <a:bodyPr vertOverflow="overflow" vert="horz" wrap="square" rtlCol="0" anchor="t" anchorCtr="0">
-            <a:spAutoFit/>
-          </a:bodyPr>
-          <a:lstStyle/>
-          <a:p>
-            <a:pPr algn="l"/>
-            <a:r>
-              <a:rPr lang="en-US" sz="4000" b="1" dirty="0">
-                <a:solidFill>
-                  <a:srgbClr val="15686B"/>
-                </a:solidFill>
-              </a:rPr>
-              <a:t>What is evidence for what?</a:t>
-            </a:r>
-          </a:p>
-        </p:txBody>
-      </p:sp>
+          <p:cNvPicPr>
+            <a:picLocks noChangeAspect="1"/>
+          </p:cNvPicPr>
+          <p:nvPr/>
+        </p:nvPicPr>
+        <p:blipFill>
+          <a:blip r:embed="rId3"/>
+          <a:stretch>
+            <a:fillRect/>
+          </a:stretch>
+        </p:blipFill>
+        <p:spPr>
+          <a:xfrm>
+            <a:off x="7147560" y="883920"/>
+            <a:ext cx="4053840" cy="4053840"/>
+          </a:xfrm>
+          <a:prstGeom prst="rect">
+            <a:avLst/>
+          </a:prstGeom>
+        </p:spPr>
+      </p:pic>
     </p:spTree>
     <p:extLst>
       <p:ext uri="{BB962C8B-B14F-4D97-AF65-F5344CB8AC3E}">
-        <p14:creationId xmlns:p14="http://schemas.microsoft.com/office/powerpoint/2010/main" val="3011881957"/>
+        <p14:creationId xmlns:p14="http://schemas.microsoft.com/office/powerpoint/2010/main" val="3031507496"/>
       </p:ext>
     </p:extLst>
   </p:cSld>
@@ -9414,7 +9545,7 @@
           <a:bodyPr/>
           <a:lstStyle/>
           <a:p>
-            <a:endParaRPr lang="en-US"/>
+            <a:endParaRPr lang="en-US" dirty="0"/>
           </a:p>
         </p:txBody>
       </p:sp>
